--- a/documentation/overviews/EPsych2_Overview.pptx
+++ b/documentation/overviews/EPsych2_Overview.pptx
@@ -4914,7 +4914,7 @@
       </p:sp>
       <p:pic>
         <p:nvPicPr>
-          <p:cNvPr id="3" name="Picture 3" descr="logo-512.png"/>
+          <p:cNvPr id="3" name="Picture 3" descr="EPsych three-channel TTL mark"/>
           <p:cNvPicPr>
             <a:picLocks noChangeAspect="1"/>
           </p:cNvPicPr>
@@ -18936,7 +18936,7 @@
       </p:sp>
       <p:pic>
         <p:nvPicPr>
-          <p:cNvPr id="20" name="Picture 20" descr="logo-128.png"/>
+          <p:cNvPr id="20" name="Picture 20" descr="EPsych three-channel TTL mark"/>
           <p:cNvPicPr>
             <a:picLocks noChangeAspect="1"/>
           </p:cNvPicPr>
@@ -28972,7 +28972,7 @@
         <p:spPr>
           <a:xfrm>
             <a:off x="566928" y="4754880"/>
-            <a:ext cx="5356419" cy="1399032"/>
+            <a:ext cx="5356419" cy="1747520"/>
           </a:xfrm>
           <a:prstGeom prst="roundRect">
             <a:avLst>
@@ -29051,7 +29051,7 @@
         <p:spPr>
           <a:xfrm>
             <a:off x="795528" y="5303520"/>
-            <a:ext cx="4899219" cy="825500"/>
+            <a:ext cx="4899219" cy="971550"/>
           </a:xfrm>
           <a:prstGeom prst="rect">
             <a:avLst/>
@@ -29083,7 +29083,7 @@
                 </a:solidFill>
                 <a:latin typeface="Calibri"/>
               </a:rPr>
-              <a:t> is one line in any saving function. It blanks buffer contents while keeping the metadata: one 131072-sample calibration buffer measured 245x the whole rest of a protocol.</a:t>
+              <a:t> is the one line a saving function needs to make its file reviewable later. It keeps every buffer's metadata but blanks the contents — the difference between a 67 kB snapshot and a 16 MB one in every saved file.</a:t>
             </a:r>
           </a:p>
         </p:txBody>
@@ -29097,7 +29097,7 @@
         <p:spPr>
           <a:xfrm>
             <a:off x="6268347" y="4754880"/>
-            <a:ext cx="5356420" cy="1399032"/>
+            <a:ext cx="5356420" cy="1747520"/>
           </a:xfrm>
           <a:prstGeom prst="roundRect">
             <a:avLst>
@@ -29176,7 +29176,7 @@
         <p:spPr>
           <a:xfrm>
             <a:off x="6496947" y="5303520"/>
-            <a:ext cx="4899220" cy="825500"/>
+            <a:ext cx="4899220" cy="971550"/>
           </a:xfrm>
           <a:prstGeom prst="rect">
             <a:avLst/>
